--- a/output/education/archive/2026-03-24_medical-ai-reality-integrated/medical-ai-reality-integrated_slides_allstaff.pptx
+++ b/output/education/archive/2026-03-24_medical-ai-reality-integrated/medical-ai-reality-integrated_slides_allstaff.pptx
@@ -3133,6 +3133,7 @@
               </a:defRPr>
             </a:pPr>
             <a:r>
+              <a:rPr/>
               <a:t>医療AIの「今」を知る</a:t>
             </a:r>
           </a:p>
@@ -3169,6 +3170,7 @@
               </a:defRPr>
             </a:pPr>
             <a:r>
+              <a:rPr/>
               <a:t>私たちの働き方はどう変わるのか</a:t>
             </a:r>
           </a:p>
@@ -3213,7 +3215,9 @@
           <a:bodyPr rtlCol="0" anchor="ctr"/>
           <a:lstStyle/>
           <a:p>
-            <a:pPr algn="ctr"/>
+            <a:pPr algn="ctr">
+              <a:defRPr/>
+            </a:pPr>
           </a:p>
         </p:txBody>
       </p:sp>
@@ -3248,6 +3252,7 @@
               </a:defRPr>
             </a:pPr>
             <a:r>
+              <a:rPr/>
               <a:t>全スタッフ向け 15分｜2026-03-24</a:t>
             </a:r>
           </a:p>
@@ -3288,7 +3293,7 @@
         <p:spPr>
           <a:xfrm>
             <a:off x="731520" y="274320"/>
-            <a:ext cx="7315200" cy="457200"/>
+            <a:ext cx="7315200" cy="518159"/>
           </a:xfrm>
           <a:prstGeom prst="rect">
             <a:avLst/>
@@ -3310,6 +3315,7 @@
               </a:defRPr>
             </a:pPr>
             <a:r>
+              <a:rPr/>
               <a:t>AIは今、医療でどう使われているか</a:t>
             </a:r>
           </a:p>
@@ -3356,7 +3362,9 @@
           <a:bodyPr rtlCol="0" anchor="ctr"/>
           <a:lstStyle/>
           <a:p>
-            <a:pPr algn="ctr"/>
+            <a:pPr algn="ctr">
+              <a:defRPr/>
+            </a:pPr>
           </a:p>
         </p:txBody>
       </p:sp>
@@ -3399,7 +3407,9 @@
           <a:bodyPr rtlCol="0" anchor="ctr"/>
           <a:lstStyle/>
           <a:p>
-            <a:pPr algn="ctr"/>
+            <a:pPr algn="ctr">
+              <a:defRPr/>
+            </a:pPr>
           </a:p>
         </p:txBody>
       </p:sp>
@@ -3412,7 +3422,7 @@
         <p:spPr>
           <a:xfrm>
             <a:off x="868680" y="914400"/>
-            <a:ext cx="2286000" cy="548640"/>
+            <a:ext cx="2286000" cy="660400"/>
           </a:xfrm>
           <a:prstGeom prst="rect">
             <a:avLst/>
@@ -3434,6 +3444,7 @@
               </a:defRPr>
             </a:pPr>
             <a:r>
+              <a:rPr/>
               <a:t>94%</a:t>
             </a:r>
           </a:p>
@@ -3447,7 +3458,7 @@
         </p:nvSpPr>
         <p:spPr>
           <a:xfrm>
-            <a:off x="868680" y="1463040"/>
+            <a:off x="868680" y="1593088"/>
             <a:ext cx="2286000" cy="640080"/>
           </a:xfrm>
           <a:prstGeom prst="rect">
@@ -3470,10 +3481,12 @@
               </a:defRPr>
             </a:pPr>
             <a:r>
+              <a:rPr/>
               <a:t>の医師が</a:t>
             </a:r>
             <a:br/>
             <a:r>
+              <a:rPr/>
               <a:t>AIを利用中・検討中</a:t>
             </a:r>
           </a:p>
@@ -3487,7 +3500,7 @@
         </p:nvSpPr>
         <p:spPr>
           <a:xfrm>
-            <a:off x="868680" y="2194560"/>
+            <a:off x="868680" y="2251456"/>
             <a:ext cx="2286000" cy="457200"/>
           </a:xfrm>
           <a:prstGeom prst="rect">
@@ -3510,10 +3523,12 @@
               </a:defRPr>
             </a:pPr>
             <a:r>
+              <a:rPr/>
               <a:t>Doximity</a:t>
             </a:r>
             <a:br/>
             <a:r>
+              <a:rPr/>
               <a:t>（米国医師向けプラットフォーム）</a:t>
             </a:r>
           </a:p>
@@ -3560,7 +3575,9 @@
           <a:bodyPr rtlCol="0" anchor="ctr"/>
           <a:lstStyle/>
           <a:p>
-            <a:pPr algn="ctr"/>
+            <a:pPr algn="ctr">
+              <a:defRPr/>
+            </a:pPr>
           </a:p>
         </p:txBody>
       </p:sp>
@@ -3603,7 +3620,9 @@
           <a:bodyPr rtlCol="0" anchor="ctr"/>
           <a:lstStyle/>
           <a:p>
-            <a:pPr algn="ctr"/>
+            <a:pPr algn="ctr">
+              <a:defRPr/>
+            </a:pPr>
           </a:p>
         </p:txBody>
       </p:sp>
@@ -3616,7 +3635,7 @@
         <p:spPr>
           <a:xfrm>
             <a:off x="3657599" y="914400"/>
-            <a:ext cx="2286000" cy="548640"/>
+            <a:ext cx="2286000" cy="660400"/>
           </a:xfrm>
           <a:prstGeom prst="rect">
             <a:avLst/>
@@ -3638,6 +3657,7 @@
               </a:defRPr>
             </a:pPr>
             <a:r>
+              <a:rPr/>
               <a:t>81%</a:t>
             </a:r>
           </a:p>
@@ -3651,7 +3671,7 @@
         </p:nvSpPr>
         <p:spPr>
           <a:xfrm>
-            <a:off x="3657599" y="1463040"/>
+            <a:off x="3657599" y="1593088"/>
             <a:ext cx="2286000" cy="640080"/>
           </a:xfrm>
           <a:prstGeom prst="rect">
@@ -3674,10 +3694,12 @@
               </a:defRPr>
             </a:pPr>
             <a:r>
+              <a:rPr/>
               <a:t>のAI利用率</a:t>
             </a:r>
             <a:br/>
             <a:r>
+              <a:rPr/>
               <a:t>（2年前は38%）</a:t>
             </a:r>
           </a:p>
@@ -3691,7 +3713,7 @@
         </p:nvSpPr>
         <p:spPr>
           <a:xfrm>
-            <a:off x="3657599" y="2194560"/>
+            <a:off x="3657599" y="2251456"/>
             <a:ext cx="2286000" cy="457200"/>
           </a:xfrm>
           <a:prstGeom prst="rect">
@@ -3714,10 +3736,12 @@
               </a:defRPr>
             </a:pPr>
             <a:r>
+              <a:rPr/>
               <a:t>AMA</a:t>
             </a:r>
             <a:br/>
             <a:r>
+              <a:rPr/>
               <a:t>（米国医師会）</a:t>
             </a:r>
           </a:p>
@@ -3764,7 +3788,9 @@
           <a:bodyPr rtlCol="0" anchor="ctr"/>
           <a:lstStyle/>
           <a:p>
-            <a:pPr algn="ctr"/>
+            <a:pPr algn="ctr">
+              <a:defRPr/>
+            </a:pPr>
           </a:p>
         </p:txBody>
       </p:sp>
@@ -3807,7 +3833,9 @@
           <a:bodyPr rtlCol="0" anchor="ctr"/>
           <a:lstStyle/>
           <a:p>
-            <a:pPr algn="ctr"/>
+            <a:pPr algn="ctr">
+              <a:defRPr/>
+            </a:pPr>
           </a:p>
         </p:txBody>
       </p:sp>
@@ -3820,7 +3848,7 @@
         <p:spPr>
           <a:xfrm>
             <a:off x="6446520" y="914400"/>
-            <a:ext cx="2286000" cy="548640"/>
+            <a:ext cx="2286000" cy="660400"/>
           </a:xfrm>
           <a:prstGeom prst="rect">
             <a:avLst/>
@@ -3842,6 +3870,7 @@
               </a:defRPr>
             </a:pPr>
             <a:r>
+              <a:rPr/>
               <a:t>2時間+</a:t>
             </a:r>
           </a:p>
@@ -3855,7 +3884,7 @@
         </p:nvSpPr>
         <p:spPr>
           <a:xfrm>
-            <a:off x="6446520" y="1463040"/>
+            <a:off x="6446520" y="1593088"/>
             <a:ext cx="2286000" cy="640080"/>
           </a:xfrm>
           <a:prstGeom prst="rect">
@@ -3878,10 +3907,12 @@
               </a:defRPr>
             </a:pPr>
             <a:r>
+              <a:rPr/>
               <a:t>の時間短縮</a:t>
             </a:r>
             <a:br/>
             <a:r>
+              <a:rPr/>
               <a:t>1日あたり</a:t>
             </a:r>
           </a:p>
@@ -3895,7 +3926,7 @@
         </p:nvSpPr>
         <p:spPr>
           <a:xfrm>
-            <a:off x="6446520" y="2194560"/>
+            <a:off x="6446520" y="2251456"/>
             <a:ext cx="2286000" cy="457200"/>
           </a:xfrm>
           <a:prstGeom prst="rect">
@@ -3918,10 +3949,12 @@
               </a:defRPr>
             </a:pPr>
             <a:r>
+              <a:rPr/>
               <a:t>音声AI</a:t>
             </a:r>
             <a:br/>
             <a:r>
+              <a:rPr/>
               <a:t>カルテ記録</a:t>
             </a:r>
           </a:p>
@@ -3958,6 +3991,7 @@
               </a:defRPr>
             </a:pPr>
             <a:r>
+              <a:rPr/>
               <a:t>AIは「特別なもの」から「日常のツール」になりつつある</a:t>
             </a:r>
           </a:p>
@@ -3998,7 +4032,7 @@
         <p:spPr>
           <a:xfrm>
             <a:off x="731520" y="274320"/>
-            <a:ext cx="7315200" cy="457200"/>
+            <a:ext cx="7315200" cy="518159"/>
           </a:xfrm>
           <a:prstGeom prst="rect">
             <a:avLst/>
@@ -4020,6 +4054,7 @@
               </a:defRPr>
             </a:pPr>
             <a:r>
+              <a:rPr/>
               <a:t>AIが担っていること・まだ担えないこと</a:t>
             </a:r>
           </a:p>
@@ -4453,6 +4488,7 @@
               </a:defRPr>
             </a:pPr>
             <a:r>
+              <a:rPr/>
               <a:t>[!] AIは「医師の代わり」ではなく「医療チームの支援ツール」</a:t>
             </a:r>
           </a:p>
@@ -4493,7 +4529,7 @@
         <p:spPr>
           <a:xfrm>
             <a:off x="731520" y="274320"/>
-            <a:ext cx="7315200" cy="457200"/>
+            <a:ext cx="7315200" cy="518159"/>
           </a:xfrm>
           <a:prstGeom prst="rect">
             <a:avLst/>
@@ -4515,6 +4551,7 @@
               </a:defRPr>
             </a:pPr>
             <a:r>
+              <a:rPr/>
               <a:t>AIの光と影</a:t>
             </a:r>
           </a:p>
@@ -4561,7 +4598,9 @@
           <a:bodyPr rtlCol="0" anchor="ctr"/>
           <a:lstStyle/>
           <a:p>
-            <a:pPr algn="ctr"/>
+            <a:pPr algn="ctr">
+              <a:defRPr/>
+            </a:pPr>
           </a:p>
         </p:txBody>
       </p:sp>
@@ -4604,7 +4643,9 @@
           <a:bodyPr rtlCol="0" anchor="ctr"/>
           <a:lstStyle/>
           <a:p>
-            <a:pPr algn="ctr"/>
+            <a:pPr algn="ctr">
+              <a:defRPr/>
+            </a:pPr>
           </a:p>
         </p:txBody>
       </p:sp>
@@ -4617,7 +4658,7 @@
         <p:spPr>
           <a:xfrm>
             <a:off x="868680" y="868680"/>
-            <a:ext cx="3383280" cy="274320"/>
+            <a:ext cx="3383280" cy="340360"/>
           </a:xfrm>
           <a:prstGeom prst="rect">
             <a:avLst/>
@@ -4639,6 +4680,7 @@
               </a:defRPr>
             </a:pPr>
             <a:r>
+              <a:rPr/>
               <a:t>[+] 光の側</a:t>
             </a:r>
           </a:p>
@@ -4652,7 +4694,7 @@
         </p:nvSpPr>
         <p:spPr>
           <a:xfrm>
-            <a:off x="868680" y="1188720"/>
+            <a:off x="868680" y="1227328"/>
             <a:ext cx="3383280" cy="1828800"/>
           </a:xfrm>
           <a:prstGeom prst="rect">
@@ -4676,6 +4718,7 @@
               <a:buChar char="●"/>
             </a:pPr>
             <a:r>
+              <a:rPr/>
               <a:t>カルテ記録時間が大幅に短縮</a:t>
             </a:r>
           </a:p>
@@ -4690,6 +4733,7 @@
               <a:buChar char="●"/>
             </a:pPr>
             <a:r>
+              <a:rPr/>
               <a:t>医師の燃え尽き症候群の軽減</a:t>
             </a:r>
           </a:p>
@@ -4704,6 +4748,7 @@
               <a:buChar char="●"/>
             </a:pPr>
             <a:r>
+              <a:rPr/>
               <a:t>研修医教育の質が向上（保持率91%）</a:t>
             </a:r>
           </a:p>
@@ -4718,6 +4763,7 @@
               <a:buChar char="●"/>
             </a:pPr>
             <a:r>
+              <a:rPr/>
               <a:t>膨大な文献を瞬時に検索・要約</a:t>
             </a:r>
           </a:p>
@@ -4764,7 +4810,9 @@
           <a:bodyPr rtlCol="0" anchor="ctr"/>
           <a:lstStyle/>
           <a:p>
-            <a:pPr algn="ctr"/>
+            <a:pPr algn="ctr">
+              <a:defRPr/>
+            </a:pPr>
           </a:p>
         </p:txBody>
       </p:sp>
@@ -4807,7 +4855,9 @@
           <a:bodyPr rtlCol="0" anchor="ctr"/>
           <a:lstStyle/>
           <a:p>
-            <a:pPr algn="ctr"/>
+            <a:pPr algn="ctr">
+              <a:defRPr/>
+            </a:pPr>
           </a:p>
         </p:txBody>
       </p:sp>
@@ -4820,7 +4870,7 @@
         <p:spPr>
           <a:xfrm>
             <a:off x="4892040" y="868680"/>
-            <a:ext cx="3383280" cy="274320"/>
+            <a:ext cx="3383280" cy="340360"/>
           </a:xfrm>
           <a:prstGeom prst="rect">
             <a:avLst/>
@@ -4842,6 +4892,7 @@
               </a:defRPr>
             </a:pPr>
             <a:r>
+              <a:rPr/>
               <a:t>[!] 影の側</a:t>
             </a:r>
           </a:p>
@@ -4855,7 +4906,7 @@
         </p:nvSpPr>
         <p:spPr>
           <a:xfrm>
-            <a:off x="4892040" y="1188720"/>
+            <a:off x="4892040" y="1227328"/>
             <a:ext cx="3383280" cy="1828800"/>
           </a:xfrm>
           <a:prstGeom prst="rect">
@@ -4879,6 +4930,7 @@
               <a:buChar char="●"/>
             </a:pPr>
             <a:r>
+              <a:rPr/>
               <a:t>AIの誤りを見逃すリスク</a:t>
             </a:r>
           </a:p>
@@ -4893,6 +4945,7 @@
               <a:buChar char="●"/>
             </a:pPr>
             <a:r>
+              <a:rPr/>
               <a:t>実際の患者データでの検証が不十分</a:t>
             </a:r>
           </a:p>
@@ -4907,6 +4960,7 @@
               <a:buChar char="●"/>
             </a:pPr>
             <a:r>
+              <a:rPr/>
               <a:t>個人情報保護の課題</a:t>
             </a:r>
           </a:p>
@@ -4921,6 +4975,7 @@
               <a:buChar char="●"/>
             </a:pPr>
             <a:r>
+              <a:rPr/>
               <a:t>「AIに任せきり」の危険性</a:t>
             </a:r>
           </a:p>
@@ -4957,6 +5012,7 @@
               </a:defRPr>
             </a:pPr>
             <a:r>
+              <a:rPr/>
               <a:t>大切なのは「光」だけでも「影」だけでもなく、両方を知ること</a:t>
             </a:r>
           </a:p>
@@ -4997,7 +5053,7 @@
         <p:spPr>
           <a:xfrm>
             <a:off x="731520" y="274320"/>
-            <a:ext cx="7315200" cy="457200"/>
+            <a:ext cx="7315200" cy="518159"/>
           </a:xfrm>
           <a:prstGeom prst="rect">
             <a:avLst/>
@@ -5019,6 +5075,7 @@
               </a:defRPr>
             </a:pPr>
             <a:r>
+              <a:rPr/>
               <a:t>私たちにできること</a:t>
             </a:r>
           </a:p>
@@ -5065,7 +5122,9 @@
           <a:bodyPr rtlCol="0" anchor="ctr"/>
           <a:lstStyle/>
           <a:p>
-            <a:pPr algn="ctr"/>
+            <a:pPr algn="ctr">
+              <a:defRPr/>
+            </a:pPr>
           </a:p>
         </p:txBody>
       </p:sp>
@@ -5108,7 +5167,9 @@
           <a:bodyPr rtlCol="0" anchor="ctr"/>
           <a:lstStyle/>
           <a:p>
-            <a:pPr algn="ctr"/>
+            <a:pPr algn="ctr">
+              <a:defRPr/>
+            </a:pPr>
           </a:p>
         </p:txBody>
       </p:sp>
@@ -5143,6 +5204,7 @@
               </a:defRPr>
             </a:pPr>
             <a:r>
+              <a:rPr/>
               <a:t>知る</a:t>
             </a:r>
           </a:p>
@@ -5179,10 +5241,12 @@
               </a:defRPr>
             </a:pPr>
             <a:r>
+              <a:rPr/>
               <a:t>AIが何をしているか</a:t>
             </a:r>
             <a:br/>
             <a:r>
+              <a:rPr/>
               <a:t>理解する</a:t>
             </a:r>
           </a:p>
@@ -5229,7 +5293,9 @@
           <a:bodyPr rtlCol="0" anchor="ctr"/>
           <a:lstStyle/>
           <a:p>
-            <a:pPr algn="ctr"/>
+            <a:pPr algn="ctr">
+              <a:defRPr/>
+            </a:pPr>
           </a:p>
         </p:txBody>
       </p:sp>
@@ -5272,7 +5338,9 @@
           <a:bodyPr rtlCol="0" anchor="ctr"/>
           <a:lstStyle/>
           <a:p>
-            <a:pPr algn="ctr"/>
+            <a:pPr algn="ctr">
+              <a:defRPr/>
+            </a:pPr>
           </a:p>
         </p:txBody>
       </p:sp>
@@ -5307,6 +5375,7 @@
               </a:defRPr>
             </a:pPr>
             <a:r>
+              <a:rPr/>
               <a:t>確認する</a:t>
             </a:r>
           </a:p>
@@ -5343,10 +5412,12 @@
               </a:defRPr>
             </a:pPr>
             <a:r>
+              <a:rPr/>
               <a:t>AIの結果を</a:t>
             </a:r>
             <a:br/>
             <a:r>
+              <a:rPr/>
               <a:t>鵜呑みにしない</a:t>
             </a:r>
           </a:p>
@@ -5393,7 +5464,9 @@
           <a:bodyPr rtlCol="0" anchor="ctr"/>
           <a:lstStyle/>
           <a:p>
-            <a:pPr algn="ctr"/>
+            <a:pPr algn="ctr">
+              <a:defRPr/>
+            </a:pPr>
           </a:p>
         </p:txBody>
       </p:sp>
@@ -5436,7 +5509,9 @@
           <a:bodyPr rtlCol="0" anchor="ctr"/>
           <a:lstStyle/>
           <a:p>
-            <a:pPr algn="ctr"/>
+            <a:pPr algn="ctr">
+              <a:defRPr/>
+            </a:pPr>
           </a:p>
         </p:txBody>
       </p:sp>
@@ -5471,6 +5546,7 @@
               </a:defRPr>
             </a:pPr>
             <a:r>
+              <a:rPr/>
               <a:t>伝える</a:t>
             </a:r>
           </a:p>
@@ -5507,10 +5583,12 @@
               </a:defRPr>
             </a:pPr>
             <a:r>
+              <a:rPr/>
               <a:t>患者さんに</a:t>
             </a:r>
             <a:br/>
             <a:r>
+              <a:rPr/>
               <a:t>正直に説明する</a:t>
             </a:r>
           </a:p>
@@ -5557,7 +5635,9 @@
           <a:bodyPr rtlCol="0" anchor="ctr"/>
           <a:lstStyle/>
           <a:p>
-            <a:pPr algn="ctr"/>
+            <a:pPr algn="ctr">
+              <a:defRPr/>
+            </a:pPr>
           </a:p>
         </p:txBody>
       </p:sp>
@@ -5600,7 +5680,9 @@
           <a:bodyPr rtlCol="0" anchor="ctr"/>
           <a:lstStyle/>
           <a:p>
-            <a:pPr algn="ctr"/>
+            <a:pPr algn="ctr">
+              <a:defRPr/>
+            </a:pPr>
           </a:p>
         </p:txBody>
       </p:sp>
@@ -5635,6 +5717,7 @@
               </a:defRPr>
             </a:pPr>
             <a:r>
+              <a:rPr/>
               <a:t>学び続ける</a:t>
             </a:r>
           </a:p>
@@ -5671,10 +5754,12 @@
               </a:defRPr>
             </a:pPr>
             <a:r>
+              <a:rPr/>
               <a:t>新しい技術に</a:t>
             </a:r>
             <a:br/>
             <a:r>
+              <a:rPr/>
               <a:t>関心を持ち続ける</a:t>
             </a:r>
           </a:p>
@@ -5711,6 +5796,7 @@
               </a:defRPr>
             </a:pPr>
             <a:r>
+              <a:rPr/>
               <a:t>AIは「使う側」の姿勢で結果が変わる</a:t>
             </a:r>
           </a:p>
@@ -5751,7 +5837,7 @@
         <p:spPr>
           <a:xfrm>
             <a:off x="731520" y="274320"/>
-            <a:ext cx="7315200" cy="457200"/>
+            <a:ext cx="7315200" cy="518159"/>
           </a:xfrm>
           <a:prstGeom prst="rect">
             <a:avLst/>
@@ -5773,6 +5859,7 @@
               </a:defRPr>
             </a:pPr>
             <a:r>
+              <a:rPr/>
               <a:t>よくある質問</a:t>
             </a:r>
           </a:p>
@@ -6089,7 +6176,7 @@
         <p:spPr>
           <a:xfrm>
             <a:off x="731520" y="274320"/>
-            <a:ext cx="7315200" cy="457200"/>
+            <a:ext cx="7315200" cy="518159"/>
           </a:xfrm>
           <a:prstGeom prst="rect">
             <a:avLst/>
@@ -6111,6 +6198,7 @@
               </a:defRPr>
             </a:pPr>
             <a:r>
+              <a:rPr/>
               <a:t>今日の持ち帰り</a:t>
             </a:r>
           </a:p>
@@ -6148,6 +6236,7 @@
               <a:buChar char="●"/>
             </a:pPr>
             <a:r>
+              <a:rPr/>
               <a:t>医療AIは急速に広がっている -- 医師の94%が利用中・検討中</a:t>
             </a:r>
           </a:p>
@@ -6162,6 +6251,7 @@
               <a:buChar char="●"/>
             </a:pPr>
             <a:r>
+              <a:rPr/>
               <a:t>主な用途は「カルテ記録」と「事務作業」の効率化</a:t>
             </a:r>
           </a:p>
@@ -6176,6 +6266,7 @@
               <a:buChar char="●"/>
             </a:pPr>
             <a:r>
+              <a:rPr/>
               <a:t>光（時短・質の向上）と影（誤りのリスク・倫理課題）の両面がある</a:t>
             </a:r>
           </a:p>
@@ -6190,6 +6281,7 @@
               <a:buChar char="●"/>
             </a:pPr>
             <a:r>
+              <a:rPr/>
               <a:t>大切なのは「知る・確認する・伝える・学び続ける」の4つ</a:t>
             </a:r>
           </a:p>
@@ -6234,7 +6326,9 @@
           <a:bodyPr rtlCol="0" anchor="ctr"/>
           <a:lstStyle/>
           <a:p>
-            <a:pPr algn="ctr"/>
+            <a:pPr algn="ctr">
+              <a:defRPr/>
+            </a:pPr>
           </a:p>
         </p:txBody>
       </p:sp>
@@ -6269,10 +6363,12 @@
               </a:defRPr>
             </a:pPr>
             <a:r>
+              <a:rPr/>
               <a:t>AIは「怖いもの」でも「魔法」でもない。</a:t>
             </a:r>
             <a:br/>
             <a:r>
+              <a:rPr/>
               <a:t>正しく知って、賢く付き合っていくための第一歩。</a:t>
             </a:r>
           </a:p>
